--- a/slides/decks/L05A-training.pptx
+++ b/slides/decks/L05A-training.pptx
@@ -116,13 +116,13 @@
   <p:extLst>
     <p:ext uri="{521415D9-36F7-43E2-AB2F-B90AF26B5E84}">
       <p14:sectionLst xmlns:p14="http://schemas.microsoft.com/office/powerpoint/2010/main">
-        <p14:section name="开场" id="{39f09656-5c39-a220-76d4-07ccc90b385f}">
+        <p14:section name="开场" id="{e62145c9-e7d0-e159-0c5e-96d0e909d735}">
           <p14:sldIdLst>
             <p14:sldId id="256"/>
             <p14:sldId id="257"/>
           </p14:sldIdLst>
         </p14:section>
-        <p14:section name="讲解" id="{9e82d860-e333-2678-ea63-a107fb361b74}">
+        <p14:section name="讲解" id="{c17752e3-d9df-ae6a-8b25-d174dd3c410d}">
           <p14:sldIdLst>
             <p14:sldId id="258"/>
             <p14:sldId id="259"/>
@@ -131,13 +131,13 @@
             <p14:sldId id="262"/>
           </p14:sldIdLst>
         </p14:section>
-        <p14:section name="练习" id="{95b72c26-570b-2f03-d98f-6dd8337ccf20}">
+        <p14:section name="练习" id="{95d65e58-e5cc-9f45-10f8-3faa8301ffae}">
           <p14:sldIdLst>
             <p14:sldId id="263"/>
             <p14:sldId id="264"/>
           </p14:sldIdLst>
         </p14:section>
-        <p14:section name="收束" id="{07255086-7e5e-1b2f-c54d-f0c985817418}">
+        <p14:section name="收束" id="{c1d7d415-6b20-3934-c22e-ffc71171662d}">
           <p14:sldIdLst>
             <p14:sldId id="265"/>
           </p14:sldIdLst>
